--- a/public/fun/pack/pptx/birthday/돌잔치_44_감사인사중심_대보름달집.pptx
+++ b/public/fun/pack/pptx/birthday/돌잔치_44_감사인사중심_대보름달집.pptx
@@ -3286,6 +3286,14 @@
 <file path=ppt/slides/slide1.xml><?xml version="1.0" encoding="utf-8"?>
 <p:sld xmlns:a="http://schemas.openxmlformats.org/drawingml/2006/main" xmlns:p="http://schemas.openxmlformats.org/presentationml/2006/main" xmlns:r="http://schemas.openxmlformats.org/officeDocument/2006/relationships">
   <p:cSld>
+    <p:bg>
+      <p:bgPr>
+        <a:solidFill>
+          <a:srgbClr val="F6EDD5"/>
+        </a:solidFill>
+        <a:effectLst/>
+      </p:bgPr>
+    </p:bg>
     <p:spTree>
       <p:nvGrpSpPr>
         <p:cNvPr id="1" name=""/>
@@ -3293,30 +3301,116 @@
         <p:nvPr/>
       </p:nvGrpSpPr>
       <p:grpSpPr/>
-      <p:pic>
-        <p:nvPicPr>
-          <p:cNvPr id="3" name="표지 그림" descr="birthday-44.jpg"/>
-          <p:cNvPicPr>
-            <a:picLocks noChangeAspect="1"/>
-          </p:cNvPicPr>
+      <p:sp>
+        <p:nvSpPr>
+          <p:cNvPr id="3" name="사진 자리"/>
+          <p:cNvSpPr/>
           <p:nvPr/>
-        </p:nvPicPr>
-        <p:blipFill>
-          <a:blip r:embed="rId2"/>
-          <a:stretch>
-            <a:fillRect/>
-          </a:stretch>
-        </p:blipFill>
-        <p:spPr>
-          <a:xfrm>
-            <a:off x="0" y="0"/>
-            <a:ext cx="12191695" cy="6858000"/>
+        </p:nvSpPr>
+        <p:spPr>
+          <a:xfrm>
+            <a:off x="7802684" y="0"/>
+            <a:ext cx="4389010" cy="6858000"/>
           </a:xfrm>
           <a:prstGeom prst="rect">
             <a:avLst/>
           </a:prstGeom>
-        </p:spPr>
-      </p:pic>
+          <a:solidFill>
+            <a:srgbClr val="EBDAAD"/>
+          </a:solidFill>
+          <a:ln>
+            <a:noFill/>
+          </a:ln>
+        </p:spPr>
+        <p:txBody>
+          <a:bodyPr rtlCol="0" anchor="ctr" wrap="square" lIns="54864" rIns="54864" tIns="27432" bIns="27432">
+            <a:noAutofit/>
+          </a:bodyPr>
+          <a:lstStyle/>
+          <a:p>
+            <a:pPr algn="ctr">
+              <a:lnSpc>
+                <a:spcPct val="100000"/>
+              </a:lnSpc>
+            </a:pPr>
+            <a:r>
+              <a:rPr sz="1400" b="0" i="0">
+                <a:solidFill>
+                  <a:srgbClr val="494027"/>
+                </a:solidFill>
+              </a:rPr>
+              <a:t>사진을 넣어 주세요</a:t>
+            </a:r>
+          </a:p>
+        </p:txBody>
+      </p:sp>
+      <p:sp>
+        <p:nvSpPr>
+          <p:cNvPr id="4" name="장식"/>
+          <p:cNvSpPr/>
+          <p:nvPr/>
+        </p:nvSpPr>
+        <p:spPr>
+          <a:xfrm>
+            <a:off x="8168435" y="365760"/>
+            <a:ext cx="3657508" cy="6126480"/>
+          </a:xfrm>
+          <a:prstGeom prst="rect">
+            <a:avLst/>
+          </a:prstGeom>
+          <a:noFill/>
+          <a:ln w="9525">
+            <a:solidFill>
+              <a:srgbClr val="26231F"/>
+            </a:solidFill>
+          </a:ln>
+        </p:spPr>
+        <p:txBody>
+          <a:bodyPr rtlCol="0" anchor="ctr"/>
+          <a:lstStyle/>
+          <a:p>
+            <a:pPr algn="ctr"/>
+          </a:p>
+        </p:txBody>
+      </p:sp>
+      <p:sp>
+        <p:nvSpPr>
+          <p:cNvPr id="5" name="라벨"/>
+          <p:cNvSpPr txBox="1"/>
+          <p:nvPr/>
+        </p:nvSpPr>
+        <p:spPr>
+          <a:xfrm>
+            <a:off x="822960" y="2148840"/>
+            <a:ext cx="5608179" cy="274320"/>
+          </a:xfrm>
+          <a:prstGeom prst="rect">
+            <a:avLst/>
+          </a:prstGeom>
+          <a:noFill/>
+        </p:spPr>
+        <p:txBody>
+          <a:bodyPr wrap="square" lIns="54864" rIns="54864" tIns="27432" bIns="27432" anchor="t">
+            <a:noAutofit/>
+          </a:bodyPr>
+          <a:lstStyle/>
+          <a:p>
+            <a:pPr algn="l">
+              <a:lnSpc>
+                <a:spcPct val="115000"/>
+              </a:lnSpc>
+            </a:pPr>
+            <a:r>
+              <a:rPr sz="1000" b="1" i="0" spc="250">
+                <a:solidFill>
+                  <a:srgbClr val="26231F"/>
+                </a:solidFill>
+              </a:rPr>
+              <a:t>FIRST BIRTHDAY</a:t>
+            </a:r>
+          </a:p>
+        </p:txBody>
+      </p:sp>
       <p:sp>
         <p:nvSpPr>
           <p:cNvPr id="2" name="Title 1"/>
@@ -3329,8 +3423,8 @@
         </p:nvSpPr>
         <p:spPr>
           <a:xfrm>
-            <a:off x="853418" y="2057400"/>
-            <a:ext cx="6095847" cy="1554480"/>
+            <a:off x="822960" y="2606040"/>
+            <a:ext cx="5608179" cy="1188720"/>
           </a:xfrm>
         </p:spPr>
         <p:txBody>
@@ -3347,7 +3441,7 @@
             <a:r>
               <a:rPr sz="4000" b="1" i="0">
                 <a:solidFill>
-                  <a:srgbClr val="544212"/>
+                  <a:srgbClr val="26231F"/>
                 </a:solidFill>
               </a:rPr>
               <a:t>첫 번째 생일</a:t>
@@ -3357,14 +3451,14 @@
       </p:sp>
       <p:sp>
         <p:nvSpPr>
-          <p:cNvPr id="4" name="한 줄 문구"/>
+          <p:cNvPr id="6" name="한 줄 문구"/>
           <p:cNvSpPr txBox="1"/>
           <p:nvPr/>
         </p:nvSpPr>
         <p:spPr>
           <a:xfrm>
-            <a:off x="853418" y="3749039"/>
-            <a:ext cx="6095847" cy="822960"/>
+            <a:off x="822960" y="3886200"/>
+            <a:ext cx="5608179" cy="822960"/>
           </a:xfrm>
           <a:prstGeom prst="rect">
             <a:avLst/>
@@ -3383,9 +3477,9 @@
               </a:lnSpc>
             </a:pPr>
             <a:r>
-              <a:rPr sz="1700" b="0" i="1">
+              <a:rPr sz="1700" b="0" i="0">
                 <a:solidFill>
-                  <a:srgbClr val="544212"/>
+                  <a:srgbClr val="26231F"/>
                 </a:solidFill>
               </a:rPr>
               <a:t>추운 날 와 주셔서 고맙습니다</a:t>
@@ -3395,14 +3489,14 @@
       </p:sp>
       <p:sp>
         <p:nvSpPr>
-          <p:cNvPr id="5" name="안내 문구"/>
+          <p:cNvPr id="7" name="안내 문구"/>
           <p:cNvSpPr txBox="1"/>
           <p:nvPr/>
         </p:nvSpPr>
         <p:spPr>
           <a:xfrm>
-            <a:off x="853418" y="4617720"/>
-            <a:ext cx="6095847" cy="914400"/>
+            <a:off x="822960" y="4754880"/>
+            <a:ext cx="5608179" cy="914400"/>
           </a:xfrm>
           <a:prstGeom prst="rect">
             <a:avLst/>
@@ -3423,10 +3517,10 @@
             <a:r>
               <a:rPr sz="1400" b="0" i="0">
                 <a:solidFill>
-                  <a:srgbClr val="666666"/>
+                  <a:srgbClr val="26231F"/>
                 </a:solidFill>
               </a:rPr>
-              <a:t>아기 이름 · 2027. 00. 00</a:t>
+              <a:t>아기 이름 · 날짜 입력</a:t>
             </a:r>
           </a:p>
           <a:p>
@@ -3438,7 +3532,7 @@
             <a:r>
               <a:rPr sz="1400" b="0" i="0">
                 <a:solidFill>
-                  <a:srgbClr val="666666"/>
+                  <a:srgbClr val="26231F"/>
                 </a:solidFill>
               </a:rPr>
               <a:t>장소를 입력하세요</a:t>
@@ -3460,7 +3554,7 @@
     <p:bg>
       <p:bgPr>
         <a:solidFill>
-          <a:srgbClr val="FBF8EE"/>
+          <a:srgbClr val="FFFFFF"/>
         </a:solidFill>
         <a:effectLst/>
       </p:bgPr>
@@ -3479,18 +3573,15 @@
           <p:nvPr/>
         </p:nvSpPr>
         <p:spPr>
-          <a:xfrm rot="10800000">
-            <a:off x="10637215" y="0"/>
-            <a:ext cx="914400" cy="1554480"/>
-          </a:xfrm>
-          <a:prstGeom prst="round2SameRect">
-            <a:avLst>
-              <a:gd name="adj1" fmla="val 50000"/>
-              <a:gd name="adj2" fmla="val 0"/>
-            </a:avLst>
+          <a:xfrm>
+            <a:off x="0" y="6565392"/>
+            <a:ext cx="12191695" cy="292608"/>
+          </a:xfrm>
+          <a:prstGeom prst="rect">
+            <a:avLst/>
           </a:prstGeom>
           <a:solidFill>
-            <a:srgbClr val="F6EACB"/>
+            <a:srgbClr val="EBDAAD"/>
           </a:solidFill>
           <a:ln>
             <a:noFill/>
@@ -3506,6 +3597,102 @@
       </p:sp>
       <p:sp>
         <p:nvSpPr>
+          <p:cNvPr id="4" name="장식"/>
+          <p:cNvSpPr/>
+          <p:nvPr/>
+        </p:nvSpPr>
+        <p:spPr>
+          <a:xfrm>
+            <a:off x="640080" y="6400800"/>
+            <a:ext cx="10911535" cy="10972"/>
+          </a:xfrm>
+          <a:prstGeom prst="rect">
+            <a:avLst/>
+          </a:prstGeom>
+          <a:solidFill>
+            <a:srgbClr val="26231F"/>
+          </a:solidFill>
+          <a:ln>
+            <a:noFill/>
+          </a:ln>
+        </p:spPr>
+        <p:txBody>
+          <a:bodyPr rtlCol="0" anchor="ctr"/>
+          <a:lstStyle/>
+          <a:p>
+            <a:pPr algn="ctr"/>
+          </a:p>
+        </p:txBody>
+      </p:sp>
+      <p:sp>
+        <p:nvSpPr>
+          <p:cNvPr id="5" name="하단 라벨"/>
+          <p:cNvSpPr txBox="1"/>
+          <p:nvPr/>
+        </p:nvSpPr>
+        <p:spPr>
+          <a:xfrm>
+            <a:off x="640080" y="6437376"/>
+            <a:ext cx="5486400" cy="274320"/>
+          </a:xfrm>
+          <a:prstGeom prst="rect">
+            <a:avLst/>
+          </a:prstGeom>
+          <a:noFill/>
+        </p:spPr>
+        <p:txBody>
+          <a:bodyPr wrap="square" lIns="54864" rIns="54864" tIns="27432" bIns="27432" anchor="ctr">
+            <a:noAutofit/>
+          </a:bodyPr>
+          <a:lstStyle/>
+          <a:p>
+            <a:pPr algn="l">
+              <a:lnSpc>
+                <a:spcPct val="115000"/>
+              </a:lnSpc>
+            </a:pPr>
+            <a:r>
+              <a:rPr sz="900" b="1" i="0" spc="250">
+                <a:solidFill>
+                  <a:srgbClr val="26231F"/>
+                </a:solidFill>
+              </a:rPr>
+              <a:t>FIRST BIRTHDAY</a:t>
+            </a:r>
+          </a:p>
+        </p:txBody>
+      </p:sp>
+      <p:sp>
+        <p:nvSpPr>
+          <p:cNvPr id="6" name="포인트"/>
+          <p:cNvSpPr/>
+          <p:nvPr/>
+        </p:nvSpPr>
+        <p:spPr>
+          <a:xfrm>
+            <a:off x="11213287" y="6473952"/>
+            <a:ext cx="219456" cy="219456"/>
+          </a:xfrm>
+          <a:prstGeom prst="donut">
+            <a:avLst/>
+          </a:prstGeom>
+          <a:solidFill>
+            <a:srgbClr val="E1CE98"/>
+          </a:solidFill>
+          <a:ln>
+            <a:noFill/>
+          </a:ln>
+        </p:spPr>
+        <p:txBody>
+          <a:bodyPr rtlCol="0" anchor="ctr"/>
+          <a:lstStyle/>
+          <a:p>
+            <a:pPr algn="ctr"/>
+          </a:p>
+        </p:txBody>
+      </p:sp>
+      <p:sp>
+        <p:nvSpPr>
           <p:cNvPr id="2" name="Title 1"/>
           <p:cNvSpPr>
             <a:spLocks noGrp="1"/>
@@ -3516,8 +3703,8 @@
         </p:nvSpPr>
         <p:spPr>
           <a:xfrm>
-            <a:off x="640080" y="457200"/>
-            <a:ext cx="9722815" cy="868680"/>
+            <a:off x="640080" y="502920"/>
+            <a:ext cx="10911535" cy="914400"/>
           </a:xfrm>
         </p:spPr>
         <p:txBody>
@@ -3534,7 +3721,7 @@
             <a:r>
               <a:rPr sz="3000" b="1" i="0">
                 <a:solidFill>
-                  <a:srgbClr val="544212"/>
+                  <a:srgbClr val="26231F"/>
                 </a:solidFill>
               </a:rPr>
               <a:t>우리 아기를 소개합니다</a:t>
@@ -3544,14 +3731,14 @@
       </p:sp>
       <p:sp>
         <p:nvSpPr>
-          <p:cNvPr id="4" name="사진 자리"/>
+          <p:cNvPr id="7" name="사진 자리"/>
           <p:cNvSpPr/>
           <p:nvPr/>
         </p:nvSpPr>
         <p:spPr>
           <a:xfrm>
             <a:off x="640080" y="1600200"/>
-            <a:ext cx="3840480" cy="4617720"/>
+            <a:ext cx="3840480" cy="4389120"/>
           </a:xfrm>
           <a:prstGeom prst="roundRect">
             <a:avLst>
@@ -3559,12 +3746,10 @@
             </a:avLst>
           </a:prstGeom>
           <a:solidFill>
-            <a:srgbClr val="F6EACB"/>
+            <a:srgbClr val="F6EDD5"/>
           </a:solidFill>
           <a:ln w="19050">
-            <a:solidFill>
-              <a:srgbClr val="A78425"/>
-            </a:solidFill>
+            <a:noFill/>
             <a:prstDash val="dash"/>
           </a:ln>
         </p:spPr>
@@ -3582,7 +3767,7 @@
             <a:r>
               <a:rPr sz="1400" b="0" i="0">
                 <a:solidFill>
-                  <a:srgbClr val="544212"/>
+                  <a:srgbClr val="8E8780"/>
                 </a:solidFill>
               </a:rPr>
               <a:t>아기 사진을 넣어 주세요</a:t>
@@ -3592,7 +3777,7 @@
       </p:sp>
       <p:graphicFrame>
         <p:nvGraphicFramePr>
-          <p:cNvPr id="5" name="표"/>
+          <p:cNvPr id="8" name="표"/>
           <p:cNvGraphicFramePr>
             <a:graphicFrameLocks noGrp="1"/>
           </p:cNvGraphicFramePr>
@@ -3622,7 +3807,7 @@
                       <a:r>
                         <a:rPr sz="1500" b="1">
                           <a:solidFill>
-                            <a:srgbClr val="544212"/>
+                            <a:srgbClr val="494027"/>
                           </a:solidFill>
                         </a:rPr>
                         <a:t>이름</a:t>
@@ -3632,30 +3817,30 @@
                   <a:tcPr anchor="ctr" marL="73152" marR="73152">
                     <a:lnL w="9525" cap="flat" cmpd="sng" algn="ctr">
                       <a:solidFill>
-                        <a:srgbClr val="F6EACB"/>
+                        <a:srgbClr val="F6EDD5"/>
                       </a:solidFill>
                       <a:prstDash val="solid"/>
                     </a:lnL>
                     <a:lnR w="9525" cap="flat" cmpd="sng" algn="ctr">
                       <a:solidFill>
-                        <a:srgbClr val="F6EACB"/>
+                        <a:srgbClr val="F6EDD5"/>
                       </a:solidFill>
                       <a:prstDash val="solid"/>
                     </a:lnR>
                     <a:lnT w="9525" cap="flat" cmpd="sng" algn="ctr">
                       <a:solidFill>
-                        <a:srgbClr val="F6EACB"/>
+                        <a:srgbClr val="F6EDD5"/>
                       </a:solidFill>
                       <a:prstDash val="solid"/>
                     </a:lnT>
                     <a:lnB w="9525" cap="flat" cmpd="sng" algn="ctr">
                       <a:solidFill>
-                        <a:srgbClr val="F6EACB"/>
+                        <a:srgbClr val="F6EDD5"/>
                       </a:solidFill>
                       <a:prstDash val="solid"/>
                     </a:lnB>
                     <a:solidFill>
-                      <a:srgbClr val="F6EACB"/>
+                      <a:srgbClr val="F6EDD5"/>
                     </a:solidFill>
                   </a:tcPr>
                 </a:tc>
@@ -3668,7 +3853,7 @@
                       <a:r>
                         <a:rPr sz="1500" b="0">
                           <a:solidFill>
-                            <a:srgbClr val="2B2B2B"/>
+                            <a:srgbClr val="26231F"/>
                           </a:solidFill>
                         </a:rPr>
                         <a:t>입력하세요</a:t>
@@ -3678,30 +3863,30 @@
                   <a:tcPr anchor="ctr" marL="73152" marR="73152">
                     <a:lnL w="9525" cap="flat" cmpd="sng" algn="ctr">
                       <a:solidFill>
-                        <a:srgbClr val="F6EACB"/>
+                        <a:srgbClr val="F6EDD5"/>
                       </a:solidFill>
                       <a:prstDash val="solid"/>
                     </a:lnL>
                     <a:lnR w="9525" cap="flat" cmpd="sng" algn="ctr">
                       <a:solidFill>
-                        <a:srgbClr val="F6EACB"/>
+                        <a:srgbClr val="F6EDD5"/>
                       </a:solidFill>
                       <a:prstDash val="solid"/>
                     </a:lnR>
                     <a:lnT w="9525" cap="flat" cmpd="sng" algn="ctr">
                       <a:solidFill>
-                        <a:srgbClr val="F6EACB"/>
+                        <a:srgbClr val="F6EDD5"/>
                       </a:solidFill>
                       <a:prstDash val="solid"/>
                     </a:lnT>
                     <a:lnB w="9525" cap="flat" cmpd="sng" algn="ctr">
                       <a:solidFill>
-                        <a:srgbClr val="F6EACB"/>
+                        <a:srgbClr val="F6EDD5"/>
                       </a:solidFill>
                       <a:prstDash val="solid"/>
                     </a:lnB>
                     <a:solidFill>
-                      <a:srgbClr val="FBF8EE"/>
+                      <a:srgbClr val="FBF7EC"/>
                     </a:solidFill>
                   </a:tcPr>
                 </a:tc>
@@ -3716,7 +3901,7 @@
                       <a:r>
                         <a:rPr sz="1500" b="1">
                           <a:solidFill>
-                            <a:srgbClr val="544212"/>
+                            <a:srgbClr val="494027"/>
                           </a:solidFill>
                         </a:rPr>
                         <a:t>생일</a:t>
@@ -3726,30 +3911,30 @@
                   <a:tcPr anchor="ctr" marL="73152" marR="73152">
                     <a:lnL w="9525" cap="flat" cmpd="sng" algn="ctr">
                       <a:solidFill>
-                        <a:srgbClr val="F6EACB"/>
+                        <a:srgbClr val="F6EDD5"/>
                       </a:solidFill>
                       <a:prstDash val="solid"/>
                     </a:lnL>
                     <a:lnR w="9525" cap="flat" cmpd="sng" algn="ctr">
                       <a:solidFill>
-                        <a:srgbClr val="F6EACB"/>
+                        <a:srgbClr val="F6EDD5"/>
                       </a:solidFill>
                       <a:prstDash val="solid"/>
                     </a:lnR>
                     <a:lnT w="9525" cap="flat" cmpd="sng" algn="ctr">
                       <a:solidFill>
-                        <a:srgbClr val="F6EACB"/>
+                        <a:srgbClr val="F6EDD5"/>
                       </a:solidFill>
                       <a:prstDash val="solid"/>
                     </a:lnT>
                     <a:lnB w="9525" cap="flat" cmpd="sng" algn="ctr">
                       <a:solidFill>
-                        <a:srgbClr val="F6EACB"/>
+                        <a:srgbClr val="F6EDD5"/>
                       </a:solidFill>
                       <a:prstDash val="solid"/>
                     </a:lnB>
                     <a:solidFill>
-                      <a:srgbClr val="F6EACB"/>
+                      <a:srgbClr val="F6EDD5"/>
                     </a:solidFill>
                   </a:tcPr>
                 </a:tc>
@@ -3762,7 +3947,7 @@
                       <a:r>
                         <a:rPr sz="1500" b="0">
                           <a:solidFill>
-                            <a:srgbClr val="2B2B2B"/>
+                            <a:srgbClr val="26231F"/>
                           </a:solidFill>
                         </a:rPr>
                         <a:t>입력하세요</a:t>
@@ -3772,25 +3957,25 @@
                   <a:tcPr anchor="ctr" marL="73152" marR="73152">
                     <a:lnL w="9525" cap="flat" cmpd="sng" algn="ctr">
                       <a:solidFill>
-                        <a:srgbClr val="F6EACB"/>
+                        <a:srgbClr val="F6EDD5"/>
                       </a:solidFill>
                       <a:prstDash val="solid"/>
                     </a:lnL>
                     <a:lnR w="9525" cap="flat" cmpd="sng" algn="ctr">
                       <a:solidFill>
-                        <a:srgbClr val="F6EACB"/>
+                        <a:srgbClr val="F6EDD5"/>
                       </a:solidFill>
                       <a:prstDash val="solid"/>
                     </a:lnR>
                     <a:lnT w="9525" cap="flat" cmpd="sng" algn="ctr">
                       <a:solidFill>
-                        <a:srgbClr val="F6EACB"/>
+                        <a:srgbClr val="F6EDD5"/>
                       </a:solidFill>
                       <a:prstDash val="solid"/>
                     </a:lnT>
                     <a:lnB w="9525" cap="flat" cmpd="sng" algn="ctr">
                       <a:solidFill>
-                        <a:srgbClr val="F6EACB"/>
+                        <a:srgbClr val="F6EDD5"/>
                       </a:solidFill>
                       <a:prstDash val="solid"/>
                     </a:lnB>
@@ -3810,7 +3995,7 @@
                       <a:r>
                         <a:rPr sz="1500" b="1">
                           <a:solidFill>
-                            <a:srgbClr val="544212"/>
+                            <a:srgbClr val="494027"/>
                           </a:solidFill>
                         </a:rPr>
                         <a:t>키 · 몸무게</a:t>
@@ -3820,30 +4005,30 @@
                   <a:tcPr anchor="ctr" marL="73152" marR="73152">
                     <a:lnL w="9525" cap="flat" cmpd="sng" algn="ctr">
                       <a:solidFill>
-                        <a:srgbClr val="F6EACB"/>
+                        <a:srgbClr val="F6EDD5"/>
                       </a:solidFill>
                       <a:prstDash val="solid"/>
                     </a:lnL>
                     <a:lnR w="9525" cap="flat" cmpd="sng" algn="ctr">
                       <a:solidFill>
-                        <a:srgbClr val="F6EACB"/>
+                        <a:srgbClr val="F6EDD5"/>
                       </a:solidFill>
                       <a:prstDash val="solid"/>
                     </a:lnR>
                     <a:lnT w="9525" cap="flat" cmpd="sng" algn="ctr">
                       <a:solidFill>
-                        <a:srgbClr val="F6EACB"/>
+                        <a:srgbClr val="F6EDD5"/>
                       </a:solidFill>
                       <a:prstDash val="solid"/>
                     </a:lnT>
                     <a:lnB w="9525" cap="flat" cmpd="sng" algn="ctr">
                       <a:solidFill>
-                        <a:srgbClr val="F6EACB"/>
+                        <a:srgbClr val="F6EDD5"/>
                       </a:solidFill>
                       <a:prstDash val="solid"/>
                     </a:lnB>
                     <a:solidFill>
-                      <a:srgbClr val="F6EACB"/>
+                      <a:srgbClr val="F6EDD5"/>
                     </a:solidFill>
                   </a:tcPr>
                 </a:tc>
@@ -3856,7 +4041,7 @@
                       <a:r>
                         <a:rPr sz="1500" b="0">
                           <a:solidFill>
-                            <a:srgbClr val="2B2B2B"/>
+                            <a:srgbClr val="26231F"/>
                           </a:solidFill>
                         </a:rPr>
                         <a:t>입력하세요</a:t>
@@ -3866,30 +4051,30 @@
                   <a:tcPr anchor="ctr" marL="73152" marR="73152">
                     <a:lnL w="9525" cap="flat" cmpd="sng" algn="ctr">
                       <a:solidFill>
-                        <a:srgbClr val="F6EACB"/>
+                        <a:srgbClr val="F6EDD5"/>
                       </a:solidFill>
                       <a:prstDash val="solid"/>
                     </a:lnL>
                     <a:lnR w="9525" cap="flat" cmpd="sng" algn="ctr">
                       <a:solidFill>
-                        <a:srgbClr val="F6EACB"/>
+                        <a:srgbClr val="F6EDD5"/>
                       </a:solidFill>
                       <a:prstDash val="solid"/>
                     </a:lnR>
                     <a:lnT w="9525" cap="flat" cmpd="sng" algn="ctr">
                       <a:solidFill>
-                        <a:srgbClr val="F6EACB"/>
+                        <a:srgbClr val="F6EDD5"/>
                       </a:solidFill>
                       <a:prstDash val="solid"/>
                     </a:lnT>
                     <a:lnB w="9525" cap="flat" cmpd="sng" algn="ctr">
                       <a:solidFill>
-                        <a:srgbClr val="F6EACB"/>
+                        <a:srgbClr val="F6EDD5"/>
                       </a:solidFill>
                       <a:prstDash val="solid"/>
                     </a:lnB>
                     <a:solidFill>
-                      <a:srgbClr val="FBF8EE"/>
+                      <a:srgbClr val="FBF7EC"/>
                     </a:solidFill>
                   </a:tcPr>
                 </a:tc>
@@ -3904,7 +4089,7 @@
                       <a:r>
                         <a:rPr sz="1500" b="1">
                           <a:solidFill>
-                            <a:srgbClr val="544212"/>
+                            <a:srgbClr val="494027"/>
                           </a:solidFill>
                         </a:rPr>
                         <a:t>좋아하는 것</a:t>
@@ -3914,30 +4099,30 @@
                   <a:tcPr anchor="ctr" marL="73152" marR="73152">
                     <a:lnL w="9525" cap="flat" cmpd="sng" algn="ctr">
                       <a:solidFill>
-                        <a:srgbClr val="F6EACB"/>
+                        <a:srgbClr val="F6EDD5"/>
                       </a:solidFill>
                       <a:prstDash val="solid"/>
                     </a:lnL>
                     <a:lnR w="9525" cap="flat" cmpd="sng" algn="ctr">
                       <a:solidFill>
-                        <a:srgbClr val="F6EACB"/>
+                        <a:srgbClr val="F6EDD5"/>
                       </a:solidFill>
                       <a:prstDash val="solid"/>
                     </a:lnR>
                     <a:lnT w="9525" cap="flat" cmpd="sng" algn="ctr">
                       <a:solidFill>
-                        <a:srgbClr val="F6EACB"/>
+                        <a:srgbClr val="F6EDD5"/>
                       </a:solidFill>
                       <a:prstDash val="solid"/>
                     </a:lnT>
                     <a:lnB w="9525" cap="flat" cmpd="sng" algn="ctr">
                       <a:solidFill>
-                        <a:srgbClr val="F6EACB"/>
+                        <a:srgbClr val="F6EDD5"/>
                       </a:solidFill>
                       <a:prstDash val="solid"/>
                     </a:lnB>
                     <a:solidFill>
-                      <a:srgbClr val="F6EACB"/>
+                      <a:srgbClr val="F6EDD5"/>
                     </a:solidFill>
                   </a:tcPr>
                 </a:tc>
@@ -3950,7 +4135,7 @@
                       <a:r>
                         <a:rPr sz="1500" b="0">
                           <a:solidFill>
-                            <a:srgbClr val="2B2B2B"/>
+                            <a:srgbClr val="26231F"/>
                           </a:solidFill>
                         </a:rPr>
                         <a:t>입력하세요</a:t>
@@ -3960,25 +4145,25 @@
                   <a:tcPr anchor="ctr" marL="73152" marR="73152">
                     <a:lnL w="9525" cap="flat" cmpd="sng" algn="ctr">
                       <a:solidFill>
-                        <a:srgbClr val="F6EACB"/>
+                        <a:srgbClr val="F6EDD5"/>
                       </a:solidFill>
                       <a:prstDash val="solid"/>
                     </a:lnL>
                     <a:lnR w="9525" cap="flat" cmpd="sng" algn="ctr">
                       <a:solidFill>
-                        <a:srgbClr val="F6EACB"/>
+                        <a:srgbClr val="F6EDD5"/>
                       </a:solidFill>
                       <a:prstDash val="solid"/>
                     </a:lnR>
                     <a:lnT w="9525" cap="flat" cmpd="sng" algn="ctr">
                       <a:solidFill>
-                        <a:srgbClr val="F6EACB"/>
+                        <a:srgbClr val="F6EDD5"/>
                       </a:solidFill>
                       <a:prstDash val="solid"/>
                     </a:lnT>
                     <a:lnB w="9525" cap="flat" cmpd="sng" algn="ctr">
                       <a:solidFill>
-                        <a:srgbClr val="F6EACB"/>
+                        <a:srgbClr val="F6EDD5"/>
                       </a:solidFill>
                       <a:prstDash val="solid"/>
                     </a:lnB>
@@ -3998,7 +4183,7 @@
                       <a:r>
                         <a:rPr sz="1500" b="1">
                           <a:solidFill>
-                            <a:srgbClr val="544212"/>
+                            <a:srgbClr val="494027"/>
                           </a:solidFill>
                         </a:rPr>
                         <a:t>별명</a:t>
@@ -4008,30 +4193,30 @@
                   <a:tcPr anchor="ctr" marL="73152" marR="73152">
                     <a:lnL w="9525" cap="flat" cmpd="sng" algn="ctr">
                       <a:solidFill>
-                        <a:srgbClr val="F6EACB"/>
+                        <a:srgbClr val="F6EDD5"/>
                       </a:solidFill>
                       <a:prstDash val="solid"/>
                     </a:lnL>
                     <a:lnR w="9525" cap="flat" cmpd="sng" algn="ctr">
                       <a:solidFill>
-                        <a:srgbClr val="F6EACB"/>
+                        <a:srgbClr val="F6EDD5"/>
                       </a:solidFill>
                       <a:prstDash val="solid"/>
                     </a:lnR>
                     <a:lnT w="9525" cap="flat" cmpd="sng" algn="ctr">
                       <a:solidFill>
-                        <a:srgbClr val="F6EACB"/>
+                        <a:srgbClr val="F6EDD5"/>
                       </a:solidFill>
                       <a:prstDash val="solid"/>
                     </a:lnT>
                     <a:lnB w="9525" cap="flat" cmpd="sng" algn="ctr">
                       <a:solidFill>
-                        <a:srgbClr val="F6EACB"/>
+                        <a:srgbClr val="F6EDD5"/>
                       </a:solidFill>
                       <a:prstDash val="solid"/>
                     </a:lnB>
                     <a:solidFill>
-                      <a:srgbClr val="F6EACB"/>
+                      <a:srgbClr val="F6EDD5"/>
                     </a:solidFill>
                   </a:tcPr>
                 </a:tc>
@@ -4044,7 +4229,7 @@
                       <a:r>
                         <a:rPr sz="1500" b="0">
                           <a:solidFill>
-                            <a:srgbClr val="2B2B2B"/>
+                            <a:srgbClr val="26231F"/>
                           </a:solidFill>
                         </a:rPr>
                         <a:t>입력하세요</a:t>
@@ -4054,30 +4239,30 @@
                   <a:tcPr anchor="ctr" marL="73152" marR="73152">
                     <a:lnL w="9525" cap="flat" cmpd="sng" algn="ctr">
                       <a:solidFill>
-                        <a:srgbClr val="F6EACB"/>
+                        <a:srgbClr val="F6EDD5"/>
                       </a:solidFill>
                       <a:prstDash val="solid"/>
                     </a:lnL>
                     <a:lnR w="9525" cap="flat" cmpd="sng" algn="ctr">
                       <a:solidFill>
-                        <a:srgbClr val="F6EACB"/>
+                        <a:srgbClr val="F6EDD5"/>
                       </a:solidFill>
                       <a:prstDash val="solid"/>
                     </a:lnR>
                     <a:lnT w="9525" cap="flat" cmpd="sng" algn="ctr">
                       <a:solidFill>
-                        <a:srgbClr val="F6EACB"/>
+                        <a:srgbClr val="F6EDD5"/>
                       </a:solidFill>
                       <a:prstDash val="solid"/>
                     </a:lnT>
                     <a:lnB w="9525" cap="flat" cmpd="sng" algn="ctr">
                       <a:solidFill>
-                        <a:srgbClr val="F6EACB"/>
+                        <a:srgbClr val="F6EDD5"/>
                       </a:solidFill>
                       <a:prstDash val="solid"/>
                     </a:lnB>
                     <a:solidFill>
-                      <a:srgbClr val="FBF8EE"/>
+                      <a:srgbClr val="FBF7EC"/>
                     </a:solidFill>
                   </a:tcPr>
                 </a:tc>
@@ -4092,7 +4277,7 @@
                       <a:r>
                         <a:rPr sz="1500" b="1">
                           <a:solidFill>
-                            <a:srgbClr val="544212"/>
+                            <a:srgbClr val="494027"/>
                           </a:solidFill>
                         </a:rPr>
                         <a:t>부모의 마음</a:t>
@@ -4102,30 +4287,30 @@
                   <a:tcPr anchor="ctr" marL="73152" marR="73152">
                     <a:lnL w="9525" cap="flat" cmpd="sng" algn="ctr">
                       <a:solidFill>
-                        <a:srgbClr val="F6EACB"/>
+                        <a:srgbClr val="F6EDD5"/>
                       </a:solidFill>
                       <a:prstDash val="solid"/>
                     </a:lnL>
                     <a:lnR w="9525" cap="flat" cmpd="sng" algn="ctr">
                       <a:solidFill>
-                        <a:srgbClr val="F6EACB"/>
+                        <a:srgbClr val="F6EDD5"/>
                       </a:solidFill>
                       <a:prstDash val="solid"/>
                     </a:lnR>
                     <a:lnT w="9525" cap="flat" cmpd="sng" algn="ctr">
                       <a:solidFill>
-                        <a:srgbClr val="F6EACB"/>
+                        <a:srgbClr val="F6EDD5"/>
                       </a:solidFill>
                       <a:prstDash val="solid"/>
                     </a:lnT>
                     <a:lnB w="9525" cap="flat" cmpd="sng" algn="ctr">
                       <a:solidFill>
-                        <a:srgbClr val="F6EACB"/>
+                        <a:srgbClr val="F6EDD5"/>
                       </a:solidFill>
                       <a:prstDash val="solid"/>
                     </a:lnB>
                     <a:solidFill>
-                      <a:srgbClr val="F6EACB"/>
+                      <a:srgbClr val="F6EDD5"/>
                     </a:solidFill>
                   </a:tcPr>
                 </a:tc>
@@ -4138,7 +4323,7 @@
                       <a:r>
                         <a:rPr sz="1500" b="0">
                           <a:solidFill>
-                            <a:srgbClr val="2B2B2B"/>
+                            <a:srgbClr val="26231F"/>
                           </a:solidFill>
                         </a:rPr>
                         <a:t>입력하세요</a:t>
@@ -4148,25 +4333,25 @@
                   <a:tcPr anchor="ctr" marL="73152" marR="73152">
                     <a:lnL w="9525" cap="flat" cmpd="sng" algn="ctr">
                       <a:solidFill>
-                        <a:srgbClr val="F6EACB"/>
+                        <a:srgbClr val="F6EDD5"/>
                       </a:solidFill>
                       <a:prstDash val="solid"/>
                     </a:lnL>
                     <a:lnR w="9525" cap="flat" cmpd="sng" algn="ctr">
                       <a:solidFill>
-                        <a:srgbClr val="F6EACB"/>
+                        <a:srgbClr val="F6EDD5"/>
                       </a:solidFill>
                       <a:prstDash val="solid"/>
                     </a:lnR>
                     <a:lnT w="9525" cap="flat" cmpd="sng" algn="ctr">
                       <a:solidFill>
-                        <a:srgbClr val="F6EACB"/>
+                        <a:srgbClr val="F6EDD5"/>
                       </a:solidFill>
                       <a:prstDash val="solid"/>
                     </a:lnT>
                     <a:lnB w="9525" cap="flat" cmpd="sng" algn="ctr">
                       <a:solidFill>
-                        <a:srgbClr val="F6EACB"/>
+                        <a:srgbClr val="F6EDD5"/>
                       </a:solidFill>
                       <a:prstDash val="solid"/>
                     </a:lnB>
@@ -4194,7 +4379,7 @@
     <p:bg>
       <p:bgPr>
         <a:solidFill>
-          <a:srgbClr val="FBF8EE"/>
+          <a:srgbClr val="FFFFFF"/>
         </a:solidFill>
         <a:effectLst/>
       </p:bgPr>
@@ -4213,18 +4398,15 @@
           <p:nvPr/>
         </p:nvSpPr>
         <p:spPr>
-          <a:xfrm rot="10800000">
-            <a:off x="10637215" y="0"/>
-            <a:ext cx="914400" cy="1554480"/>
-          </a:xfrm>
-          <a:prstGeom prst="round2SameRect">
-            <a:avLst>
-              <a:gd name="adj1" fmla="val 50000"/>
-              <a:gd name="adj2" fmla="val 0"/>
-            </a:avLst>
+          <a:xfrm>
+            <a:off x="0" y="6565392"/>
+            <a:ext cx="12191695" cy="292608"/>
+          </a:xfrm>
+          <a:prstGeom prst="rect">
+            <a:avLst/>
           </a:prstGeom>
           <a:solidFill>
-            <a:srgbClr val="F6EACB"/>
+            <a:srgbClr val="EBDAAD"/>
           </a:solidFill>
           <a:ln>
             <a:noFill/>
@@ -4240,6 +4422,102 @@
       </p:sp>
       <p:sp>
         <p:nvSpPr>
+          <p:cNvPr id="4" name="장식"/>
+          <p:cNvSpPr/>
+          <p:nvPr/>
+        </p:nvSpPr>
+        <p:spPr>
+          <a:xfrm>
+            <a:off x="640080" y="6400800"/>
+            <a:ext cx="10911535" cy="10972"/>
+          </a:xfrm>
+          <a:prstGeom prst="rect">
+            <a:avLst/>
+          </a:prstGeom>
+          <a:solidFill>
+            <a:srgbClr val="26231F"/>
+          </a:solidFill>
+          <a:ln>
+            <a:noFill/>
+          </a:ln>
+        </p:spPr>
+        <p:txBody>
+          <a:bodyPr rtlCol="0" anchor="ctr"/>
+          <a:lstStyle/>
+          <a:p>
+            <a:pPr algn="ctr"/>
+          </a:p>
+        </p:txBody>
+      </p:sp>
+      <p:sp>
+        <p:nvSpPr>
+          <p:cNvPr id="5" name="하단 라벨"/>
+          <p:cNvSpPr txBox="1"/>
+          <p:nvPr/>
+        </p:nvSpPr>
+        <p:spPr>
+          <a:xfrm>
+            <a:off x="640080" y="6437376"/>
+            <a:ext cx="5486400" cy="274320"/>
+          </a:xfrm>
+          <a:prstGeom prst="rect">
+            <a:avLst/>
+          </a:prstGeom>
+          <a:noFill/>
+        </p:spPr>
+        <p:txBody>
+          <a:bodyPr wrap="square" lIns="54864" rIns="54864" tIns="27432" bIns="27432" anchor="ctr">
+            <a:noAutofit/>
+          </a:bodyPr>
+          <a:lstStyle/>
+          <a:p>
+            <a:pPr algn="l">
+              <a:lnSpc>
+                <a:spcPct val="115000"/>
+              </a:lnSpc>
+            </a:pPr>
+            <a:r>
+              <a:rPr sz="900" b="1" i="0" spc="250">
+                <a:solidFill>
+                  <a:srgbClr val="26231F"/>
+                </a:solidFill>
+              </a:rPr>
+              <a:t>FIRST BIRTHDAY</a:t>
+            </a:r>
+          </a:p>
+        </p:txBody>
+      </p:sp>
+      <p:sp>
+        <p:nvSpPr>
+          <p:cNvPr id="6" name="포인트"/>
+          <p:cNvSpPr/>
+          <p:nvPr/>
+        </p:nvSpPr>
+        <p:spPr>
+          <a:xfrm>
+            <a:off x="11213287" y="6473952"/>
+            <a:ext cx="219456" cy="219456"/>
+          </a:xfrm>
+          <a:prstGeom prst="donut">
+            <a:avLst/>
+          </a:prstGeom>
+          <a:solidFill>
+            <a:srgbClr val="E1CE98"/>
+          </a:solidFill>
+          <a:ln>
+            <a:noFill/>
+          </a:ln>
+        </p:spPr>
+        <p:txBody>
+          <a:bodyPr rtlCol="0" anchor="ctr"/>
+          <a:lstStyle/>
+          <a:p>
+            <a:pPr algn="ctr"/>
+          </a:p>
+        </p:txBody>
+      </p:sp>
+      <p:sp>
+        <p:nvSpPr>
           <p:cNvPr id="2" name="Title 1"/>
           <p:cNvSpPr>
             <a:spLocks noGrp="1"/>
@@ -4250,8 +4528,8 @@
         </p:nvSpPr>
         <p:spPr>
           <a:xfrm>
-            <a:off x="640080" y="457200"/>
-            <a:ext cx="9722815" cy="868680"/>
+            <a:off x="640080" y="502920"/>
+            <a:ext cx="10911535" cy="914400"/>
           </a:xfrm>
         </p:spPr>
         <p:txBody>
@@ -4268,7 +4546,7 @@
             <a:r>
               <a:rPr sz="3000" b="1" i="0">
                 <a:solidFill>
-                  <a:srgbClr val="544212"/>
+                  <a:srgbClr val="26231F"/>
                 </a:solidFill>
               </a:rPr>
               <a:t>초대합니다</a:t>
@@ -4278,26 +4556,26 @@
       </p:sp>
       <p:sp>
         <p:nvSpPr>
-          <p:cNvPr id="4" name="초대 글 칸"/>
+          <p:cNvPr id="7" name="초대 글 칸"/>
           <p:cNvSpPr/>
           <p:nvPr/>
         </p:nvSpPr>
         <p:spPr>
           <a:xfrm>
             <a:off x="640080" y="1600200"/>
-            <a:ext cx="10911535" cy="4800600"/>
+            <a:ext cx="10911535" cy="4572000"/>
           </a:xfrm>
           <a:prstGeom prst="roundRect">
             <a:avLst>
-              <a:gd name="adj" fmla="val 8000"/>
+              <a:gd name="adj" fmla="val 7000"/>
             </a:avLst>
           </a:prstGeom>
           <a:solidFill>
-            <a:srgbClr val="FBF8EE"/>
+            <a:srgbClr val="FFFFFF"/>
           </a:solidFill>
           <a:ln w="12700">
             <a:solidFill>
-              <a:srgbClr val="F6EACB"/>
+              <a:srgbClr val="EBDAAD"/>
             </a:solidFill>
           </a:ln>
         </p:spPr>
@@ -4311,14 +4589,14 @@
       </p:sp>
       <p:sp>
         <p:nvSpPr>
-          <p:cNvPr id="5" name="초대 글"/>
+          <p:cNvPr id="8" name="초대 글"/>
           <p:cNvSpPr txBox="1"/>
           <p:nvPr/>
         </p:nvSpPr>
         <p:spPr>
           <a:xfrm>
             <a:off x="1097280" y="1965960"/>
-            <a:ext cx="9997135" cy="4069080"/>
+            <a:ext cx="9997135" cy="3840480"/>
           </a:xfrm>
           <a:prstGeom prst="rect">
             <a:avLst/>
@@ -4339,7 +4617,7 @@
             <a:r>
               <a:rPr sz="2000" b="0" i="0">
                 <a:solidFill>
-                  <a:srgbClr val="2B2B2B"/>
+                  <a:srgbClr val="26231F"/>
                 </a:solidFill>
               </a:rPr>
               <a:t>저희 아이의 첫 생일에 모십니다.</a:t>
@@ -4354,7 +4632,7 @@
             <a:r>
               <a:rPr sz="2000" b="0" i="0">
                 <a:solidFill>
-                  <a:srgbClr val="2B2B2B"/>
+                  <a:srgbClr val="26231F"/>
                 </a:solidFill>
               </a:rPr>
               <a:t/>
@@ -4369,7 +4647,7 @@
             <a:r>
               <a:rPr sz="2000" b="0" i="0">
                 <a:solidFill>
-                  <a:srgbClr val="2B2B2B"/>
+                  <a:srgbClr val="26231F"/>
                 </a:solidFill>
               </a:rPr>
               <a:t>오셔서 같이 밥 한 끼 해 주세요.</a:t>
@@ -4384,7 +4662,7 @@
             <a:r>
               <a:rPr sz="2000" b="0" i="0">
                 <a:solidFill>
-                  <a:srgbClr val="2B2B2B"/>
+                  <a:srgbClr val="26231F"/>
                 </a:solidFill>
               </a:rPr>
               <a:t/>
@@ -4399,7 +4677,7 @@
             <a:r>
               <a:rPr sz="2000" b="0" i="0">
                 <a:solidFill>
-                  <a:srgbClr val="2B2B2B"/>
+                  <a:srgbClr val="26231F"/>
                 </a:solidFill>
               </a:rPr>
               <a:t>일시 · 장소를 입력하세요</a:t>
@@ -4421,7 +4699,7 @@
     <p:bg>
       <p:bgPr>
         <a:solidFill>
-          <a:srgbClr val="FBF8EE"/>
+          <a:srgbClr val="FFFFFF"/>
         </a:solidFill>
         <a:effectLst/>
       </p:bgPr>
@@ -4440,18 +4718,15 @@
           <p:nvPr/>
         </p:nvSpPr>
         <p:spPr>
-          <a:xfrm rot="10800000">
-            <a:off x="10637215" y="0"/>
-            <a:ext cx="914400" cy="1554480"/>
-          </a:xfrm>
-          <a:prstGeom prst="round2SameRect">
-            <a:avLst>
-              <a:gd name="adj1" fmla="val 50000"/>
-              <a:gd name="adj2" fmla="val 0"/>
-            </a:avLst>
+          <a:xfrm>
+            <a:off x="0" y="6565392"/>
+            <a:ext cx="12191695" cy="292608"/>
+          </a:xfrm>
+          <a:prstGeom prst="rect">
+            <a:avLst/>
           </a:prstGeom>
           <a:solidFill>
-            <a:srgbClr val="F6EACB"/>
+            <a:srgbClr val="EBDAAD"/>
           </a:solidFill>
           <a:ln>
             <a:noFill/>
@@ -4467,6 +4742,102 @@
       </p:sp>
       <p:sp>
         <p:nvSpPr>
+          <p:cNvPr id="4" name="장식"/>
+          <p:cNvSpPr/>
+          <p:nvPr/>
+        </p:nvSpPr>
+        <p:spPr>
+          <a:xfrm>
+            <a:off x="640080" y="6400800"/>
+            <a:ext cx="10911535" cy="10972"/>
+          </a:xfrm>
+          <a:prstGeom prst="rect">
+            <a:avLst/>
+          </a:prstGeom>
+          <a:solidFill>
+            <a:srgbClr val="26231F"/>
+          </a:solidFill>
+          <a:ln>
+            <a:noFill/>
+          </a:ln>
+        </p:spPr>
+        <p:txBody>
+          <a:bodyPr rtlCol="0" anchor="ctr"/>
+          <a:lstStyle/>
+          <a:p>
+            <a:pPr algn="ctr"/>
+          </a:p>
+        </p:txBody>
+      </p:sp>
+      <p:sp>
+        <p:nvSpPr>
+          <p:cNvPr id="5" name="하단 라벨"/>
+          <p:cNvSpPr txBox="1"/>
+          <p:nvPr/>
+        </p:nvSpPr>
+        <p:spPr>
+          <a:xfrm>
+            <a:off x="640080" y="6437376"/>
+            <a:ext cx="5486400" cy="274320"/>
+          </a:xfrm>
+          <a:prstGeom prst="rect">
+            <a:avLst/>
+          </a:prstGeom>
+          <a:noFill/>
+        </p:spPr>
+        <p:txBody>
+          <a:bodyPr wrap="square" lIns="54864" rIns="54864" tIns="27432" bIns="27432" anchor="ctr">
+            <a:noAutofit/>
+          </a:bodyPr>
+          <a:lstStyle/>
+          <a:p>
+            <a:pPr algn="l">
+              <a:lnSpc>
+                <a:spcPct val="115000"/>
+              </a:lnSpc>
+            </a:pPr>
+            <a:r>
+              <a:rPr sz="900" b="1" i="0" spc="250">
+                <a:solidFill>
+                  <a:srgbClr val="26231F"/>
+                </a:solidFill>
+              </a:rPr>
+              <a:t>FIRST BIRTHDAY</a:t>
+            </a:r>
+          </a:p>
+        </p:txBody>
+      </p:sp>
+      <p:sp>
+        <p:nvSpPr>
+          <p:cNvPr id="6" name="포인트"/>
+          <p:cNvSpPr/>
+          <p:nvPr/>
+        </p:nvSpPr>
+        <p:spPr>
+          <a:xfrm>
+            <a:off x="11213287" y="6473952"/>
+            <a:ext cx="219456" cy="219456"/>
+          </a:xfrm>
+          <a:prstGeom prst="donut">
+            <a:avLst/>
+          </a:prstGeom>
+          <a:solidFill>
+            <a:srgbClr val="E1CE98"/>
+          </a:solidFill>
+          <a:ln>
+            <a:noFill/>
+          </a:ln>
+        </p:spPr>
+        <p:txBody>
+          <a:bodyPr rtlCol="0" anchor="ctr"/>
+          <a:lstStyle/>
+          <a:p>
+            <a:pPr algn="ctr"/>
+          </a:p>
+        </p:txBody>
+      </p:sp>
+      <p:sp>
+        <p:nvSpPr>
           <p:cNvPr id="2" name="Title 1"/>
           <p:cNvSpPr>
             <a:spLocks noGrp="1"/>
@@ -4477,8 +4848,8 @@
         </p:nvSpPr>
         <p:spPr>
           <a:xfrm>
-            <a:off x="640080" y="457200"/>
-            <a:ext cx="9722815" cy="868680"/>
+            <a:off x="640080" y="502920"/>
+            <a:ext cx="10911535" cy="914400"/>
           </a:xfrm>
         </p:spPr>
         <p:txBody>
@@ -4495,7 +4866,7 @@
             <a:r>
               <a:rPr sz="3000" b="1" i="0">
                 <a:solidFill>
-                  <a:srgbClr val="544212"/>
+                  <a:srgbClr val="26231F"/>
                 </a:solidFill>
               </a:rPr>
               <a:t>부모의 한마디</a:t>
@@ -4505,26 +4876,26 @@
       </p:sp>
       <p:sp>
         <p:nvSpPr>
-          <p:cNvPr id="4" name="편지 칸"/>
+          <p:cNvPr id="7" name="편지 칸"/>
           <p:cNvSpPr/>
           <p:nvPr/>
         </p:nvSpPr>
         <p:spPr>
           <a:xfrm>
             <a:off x="640080" y="1600200"/>
-            <a:ext cx="10911535" cy="4800600"/>
+            <a:ext cx="10911535" cy="4572000"/>
           </a:xfrm>
           <a:prstGeom prst="roundRect">
             <a:avLst>
-              <a:gd name="adj" fmla="val 8000"/>
+              <a:gd name="adj" fmla="val 7000"/>
             </a:avLst>
           </a:prstGeom>
           <a:solidFill>
-            <a:srgbClr val="F6EACB"/>
+            <a:srgbClr val="FFFFFF"/>
           </a:solidFill>
           <a:ln w="12700">
             <a:solidFill>
-              <a:srgbClr val="A78425"/>
+              <a:srgbClr val="EBDAAD"/>
             </a:solidFill>
           </a:ln>
         </p:spPr>
@@ -4538,14 +4909,14 @@
       </p:sp>
       <p:sp>
         <p:nvSpPr>
-          <p:cNvPr id="5" name="편지 글"/>
+          <p:cNvPr id="8" name="편지 글"/>
           <p:cNvSpPr txBox="1"/>
           <p:nvPr/>
         </p:nvSpPr>
         <p:spPr>
           <a:xfrm>
             <a:off x="1097280" y="1965960"/>
-            <a:ext cx="9997135" cy="4069080"/>
+            <a:ext cx="9997135" cy="3840480"/>
           </a:xfrm>
           <a:prstGeom prst="rect">
             <a:avLst/>
@@ -4566,7 +4937,7 @@
             <a:r>
               <a:rPr sz="2000" b="0" i="0">
                 <a:solidFill>
-                  <a:srgbClr val="2B2B2B"/>
+                  <a:srgbClr val="26231F"/>
                 </a:solidFill>
               </a:rPr>
               <a:t>사랑하는 우리 아기에게</a:t>
@@ -4581,7 +4952,7 @@
             <a:r>
               <a:rPr sz="2000" b="0" i="0">
                 <a:solidFill>
-                  <a:srgbClr val="2B2B2B"/>
+                  <a:srgbClr val="26231F"/>
                 </a:solidFill>
               </a:rPr>
               <a:t/>
@@ -4596,7 +4967,7 @@
             <a:r>
               <a:rPr sz="2000" b="0" i="0">
                 <a:solidFill>
-                  <a:srgbClr val="2B2B2B"/>
+                  <a:srgbClr val="26231F"/>
                 </a:solidFill>
               </a:rPr>
               <a:t>엄마 아빠의 마음을 적어 주세요.</a:t>
@@ -4611,7 +4982,7 @@
             <a:r>
               <a:rPr sz="2000" b="0" i="0">
                 <a:solidFill>
-                  <a:srgbClr val="2B2B2B"/>
+                  <a:srgbClr val="26231F"/>
                 </a:solidFill>
               </a:rPr>
               <a:t/>
@@ -4626,7 +4997,7 @@
             <a:r>
               <a:rPr sz="2000" b="0" i="0">
                 <a:solidFill>
-                  <a:srgbClr val="2B2B2B"/>
+                  <a:srgbClr val="26231F"/>
                 </a:solidFill>
               </a:rPr>
               <a:t>― 엄마 아빠가</a:t>
@@ -4648,7 +5019,7 @@
     <p:bg>
       <p:bgPr>
         <a:solidFill>
-          <a:srgbClr val="FBF8EE"/>
+          <a:srgbClr val="FFFFFF"/>
         </a:solidFill>
         <a:effectLst/>
       </p:bgPr>
@@ -4667,18 +5038,15 @@
           <p:nvPr/>
         </p:nvSpPr>
         <p:spPr>
-          <a:xfrm rot="10800000">
-            <a:off x="10637215" y="0"/>
-            <a:ext cx="914400" cy="1554480"/>
-          </a:xfrm>
-          <a:prstGeom prst="round2SameRect">
-            <a:avLst>
-              <a:gd name="adj1" fmla="val 50000"/>
-              <a:gd name="adj2" fmla="val 0"/>
-            </a:avLst>
+          <a:xfrm>
+            <a:off x="0" y="6565392"/>
+            <a:ext cx="12191695" cy="292608"/>
+          </a:xfrm>
+          <a:prstGeom prst="rect">
+            <a:avLst/>
           </a:prstGeom>
           <a:solidFill>
-            <a:srgbClr val="F6EACB"/>
+            <a:srgbClr val="EBDAAD"/>
           </a:solidFill>
           <a:ln>
             <a:noFill/>
@@ -4694,6 +5062,102 @@
       </p:sp>
       <p:sp>
         <p:nvSpPr>
+          <p:cNvPr id="4" name="장식"/>
+          <p:cNvSpPr/>
+          <p:nvPr/>
+        </p:nvSpPr>
+        <p:spPr>
+          <a:xfrm>
+            <a:off x="640080" y="6400800"/>
+            <a:ext cx="10911535" cy="10972"/>
+          </a:xfrm>
+          <a:prstGeom prst="rect">
+            <a:avLst/>
+          </a:prstGeom>
+          <a:solidFill>
+            <a:srgbClr val="26231F"/>
+          </a:solidFill>
+          <a:ln>
+            <a:noFill/>
+          </a:ln>
+        </p:spPr>
+        <p:txBody>
+          <a:bodyPr rtlCol="0" anchor="ctr"/>
+          <a:lstStyle/>
+          <a:p>
+            <a:pPr algn="ctr"/>
+          </a:p>
+        </p:txBody>
+      </p:sp>
+      <p:sp>
+        <p:nvSpPr>
+          <p:cNvPr id="5" name="하단 라벨"/>
+          <p:cNvSpPr txBox="1"/>
+          <p:nvPr/>
+        </p:nvSpPr>
+        <p:spPr>
+          <a:xfrm>
+            <a:off x="640080" y="6437376"/>
+            <a:ext cx="5486400" cy="274320"/>
+          </a:xfrm>
+          <a:prstGeom prst="rect">
+            <a:avLst/>
+          </a:prstGeom>
+          <a:noFill/>
+        </p:spPr>
+        <p:txBody>
+          <a:bodyPr wrap="square" lIns="54864" rIns="54864" tIns="27432" bIns="27432" anchor="ctr">
+            <a:noAutofit/>
+          </a:bodyPr>
+          <a:lstStyle/>
+          <a:p>
+            <a:pPr algn="l">
+              <a:lnSpc>
+                <a:spcPct val="115000"/>
+              </a:lnSpc>
+            </a:pPr>
+            <a:r>
+              <a:rPr sz="900" b="1" i="0" spc="250">
+                <a:solidFill>
+                  <a:srgbClr val="26231F"/>
+                </a:solidFill>
+              </a:rPr>
+              <a:t>FIRST BIRTHDAY</a:t>
+            </a:r>
+          </a:p>
+        </p:txBody>
+      </p:sp>
+      <p:sp>
+        <p:nvSpPr>
+          <p:cNvPr id="6" name="포인트"/>
+          <p:cNvSpPr/>
+          <p:nvPr/>
+        </p:nvSpPr>
+        <p:spPr>
+          <a:xfrm>
+            <a:off x="11213287" y="6473952"/>
+            <a:ext cx="219456" cy="219456"/>
+          </a:xfrm>
+          <a:prstGeom prst="donut">
+            <a:avLst/>
+          </a:prstGeom>
+          <a:solidFill>
+            <a:srgbClr val="E1CE98"/>
+          </a:solidFill>
+          <a:ln>
+            <a:noFill/>
+          </a:ln>
+        </p:spPr>
+        <p:txBody>
+          <a:bodyPr rtlCol="0" anchor="ctr"/>
+          <a:lstStyle/>
+          <a:p>
+            <a:pPr algn="ctr"/>
+          </a:p>
+        </p:txBody>
+      </p:sp>
+      <p:sp>
+        <p:nvSpPr>
           <p:cNvPr id="2" name="Title 1"/>
           <p:cNvSpPr>
             <a:spLocks noGrp="1"/>
@@ -4704,8 +5168,8 @@
         </p:nvSpPr>
         <p:spPr>
           <a:xfrm>
-            <a:off x="640080" y="457200"/>
-            <a:ext cx="9722815" cy="868680"/>
+            <a:off x="640080" y="502920"/>
+            <a:ext cx="10911535" cy="914400"/>
           </a:xfrm>
         </p:spPr>
         <p:txBody>
@@ -4722,7 +5186,7 @@
             <a:r>
               <a:rPr sz="3000" b="1" i="0">
                 <a:solidFill>
-                  <a:srgbClr val="544212"/>
+                  <a:srgbClr val="26231F"/>
                 </a:solidFill>
               </a:rPr>
               <a:t>사진 모음</a:t>
@@ -4732,14 +5196,14 @@
       </p:sp>
       <p:sp>
         <p:nvSpPr>
-          <p:cNvPr id="4" name="사진 자리"/>
+          <p:cNvPr id="7" name="사진 자리"/>
           <p:cNvSpPr/>
           <p:nvPr/>
         </p:nvSpPr>
         <p:spPr>
           <a:xfrm>
             <a:off x="640080" y="1600200"/>
-            <a:ext cx="2590723" cy="2308860"/>
+            <a:ext cx="2590723" cy="2194560"/>
           </a:xfrm>
           <a:prstGeom prst="roundRect">
             <a:avLst>
@@ -4747,12 +5211,10 @@
             </a:avLst>
           </a:prstGeom>
           <a:solidFill>
-            <a:srgbClr val="F6EACB"/>
+            <a:srgbClr val="F6EDD5"/>
           </a:solidFill>
           <a:ln w="19050">
-            <a:solidFill>
-              <a:srgbClr val="A78425"/>
-            </a:solidFill>
+            <a:noFill/>
             <a:prstDash val="dash"/>
           </a:ln>
         </p:spPr>
@@ -4770,7 +5232,7 @@
             <a:r>
               <a:rPr sz="1200" b="0" i="0">
                 <a:solidFill>
-                  <a:srgbClr val="544212"/>
+                  <a:srgbClr val="8E8780"/>
                 </a:solidFill>
               </a:rPr>
               <a:t>사진 1</a:t>
@@ -4780,14 +5242,14 @@
       </p:sp>
       <p:sp>
         <p:nvSpPr>
-          <p:cNvPr id="5" name="사진 자리"/>
+          <p:cNvPr id="8" name="사진 자리"/>
           <p:cNvSpPr/>
           <p:nvPr/>
         </p:nvSpPr>
         <p:spPr>
           <a:xfrm>
             <a:off x="3413683" y="1600200"/>
-            <a:ext cx="2590723" cy="2308860"/>
+            <a:ext cx="2590723" cy="2194560"/>
           </a:xfrm>
           <a:prstGeom prst="roundRect">
             <a:avLst>
@@ -4795,12 +5257,10 @@
             </a:avLst>
           </a:prstGeom>
           <a:solidFill>
-            <a:srgbClr val="F6EACB"/>
+            <a:srgbClr val="F6EDD5"/>
           </a:solidFill>
           <a:ln w="19050">
-            <a:solidFill>
-              <a:srgbClr val="A78425"/>
-            </a:solidFill>
+            <a:noFill/>
             <a:prstDash val="dash"/>
           </a:ln>
         </p:spPr>
@@ -4818,7 +5278,7 @@
             <a:r>
               <a:rPr sz="1200" b="0" i="0">
                 <a:solidFill>
-                  <a:srgbClr val="544212"/>
+                  <a:srgbClr val="8E8780"/>
                 </a:solidFill>
               </a:rPr>
               <a:t>사진 2</a:t>
@@ -4828,14 +5288,14 @@
       </p:sp>
       <p:sp>
         <p:nvSpPr>
-          <p:cNvPr id="6" name="사진 자리"/>
+          <p:cNvPr id="9" name="사진 자리"/>
           <p:cNvSpPr/>
           <p:nvPr/>
         </p:nvSpPr>
         <p:spPr>
           <a:xfrm>
             <a:off x="6187287" y="1600200"/>
-            <a:ext cx="2590723" cy="2308860"/>
+            <a:ext cx="2590723" cy="2194560"/>
           </a:xfrm>
           <a:prstGeom prst="roundRect">
             <a:avLst>
@@ -4843,12 +5303,10 @@
             </a:avLst>
           </a:prstGeom>
           <a:solidFill>
-            <a:srgbClr val="F6EACB"/>
+            <a:srgbClr val="F6EDD5"/>
           </a:solidFill>
           <a:ln w="19050">
-            <a:solidFill>
-              <a:srgbClr val="A78425"/>
-            </a:solidFill>
+            <a:noFill/>
             <a:prstDash val="dash"/>
           </a:ln>
         </p:spPr>
@@ -4866,7 +5324,7 @@
             <a:r>
               <a:rPr sz="1200" b="0" i="0">
                 <a:solidFill>
-                  <a:srgbClr val="544212"/>
+                  <a:srgbClr val="8E8780"/>
                 </a:solidFill>
               </a:rPr>
               <a:t>사진 3</a:t>
@@ -4876,14 +5334,14 @@
       </p:sp>
       <p:sp>
         <p:nvSpPr>
-          <p:cNvPr id="7" name="사진 자리"/>
+          <p:cNvPr id="10" name="사진 자리"/>
           <p:cNvSpPr/>
           <p:nvPr/>
         </p:nvSpPr>
         <p:spPr>
           <a:xfrm>
             <a:off x="8960891" y="1600200"/>
-            <a:ext cx="2590723" cy="2308860"/>
+            <a:ext cx="2590723" cy="2194560"/>
           </a:xfrm>
           <a:prstGeom prst="roundRect">
             <a:avLst>
@@ -4891,12 +5349,10 @@
             </a:avLst>
           </a:prstGeom>
           <a:solidFill>
-            <a:srgbClr val="F6EACB"/>
+            <a:srgbClr val="F6EDD5"/>
           </a:solidFill>
           <a:ln w="19050">
-            <a:solidFill>
-              <a:srgbClr val="A78425"/>
-            </a:solidFill>
+            <a:noFill/>
             <a:prstDash val="dash"/>
           </a:ln>
         </p:spPr>
@@ -4914,7 +5370,7 @@
             <a:r>
               <a:rPr sz="1200" b="0" i="0">
                 <a:solidFill>
-                  <a:srgbClr val="544212"/>
+                  <a:srgbClr val="8E8780"/>
                 </a:solidFill>
               </a:rPr>
               <a:t>사진 4</a:t>
@@ -4924,14 +5380,14 @@
       </p:sp>
       <p:sp>
         <p:nvSpPr>
-          <p:cNvPr id="8" name="사진 자리"/>
+          <p:cNvPr id="11" name="사진 자리"/>
           <p:cNvSpPr/>
           <p:nvPr/>
         </p:nvSpPr>
         <p:spPr>
           <a:xfrm>
-            <a:off x="640080" y="4091939"/>
-            <a:ext cx="2590723" cy="2308860"/>
+            <a:off x="640080" y="3977639"/>
+            <a:ext cx="2590723" cy="2194560"/>
           </a:xfrm>
           <a:prstGeom prst="roundRect">
             <a:avLst>
@@ -4939,12 +5395,10 @@
             </a:avLst>
           </a:prstGeom>
           <a:solidFill>
-            <a:srgbClr val="F6EACB"/>
+            <a:srgbClr val="F6EDD5"/>
           </a:solidFill>
           <a:ln w="19050">
-            <a:solidFill>
-              <a:srgbClr val="A78425"/>
-            </a:solidFill>
+            <a:noFill/>
             <a:prstDash val="dash"/>
           </a:ln>
         </p:spPr>
@@ -4962,7 +5416,7 @@
             <a:r>
               <a:rPr sz="1200" b="0" i="0">
                 <a:solidFill>
-                  <a:srgbClr val="544212"/>
+                  <a:srgbClr val="8E8780"/>
                 </a:solidFill>
               </a:rPr>
               <a:t>사진 5</a:t>
@@ -4972,14 +5426,14 @@
       </p:sp>
       <p:sp>
         <p:nvSpPr>
-          <p:cNvPr id="9" name="사진 자리"/>
+          <p:cNvPr id="12" name="사진 자리"/>
           <p:cNvSpPr/>
           <p:nvPr/>
         </p:nvSpPr>
         <p:spPr>
           <a:xfrm>
-            <a:off x="3413683" y="4091939"/>
-            <a:ext cx="2590723" cy="2308860"/>
+            <a:off x="3413683" y="3977639"/>
+            <a:ext cx="2590723" cy="2194560"/>
           </a:xfrm>
           <a:prstGeom prst="roundRect">
             <a:avLst>
@@ -4987,12 +5441,10 @@
             </a:avLst>
           </a:prstGeom>
           <a:solidFill>
-            <a:srgbClr val="F6EACB"/>
+            <a:srgbClr val="F6EDD5"/>
           </a:solidFill>
           <a:ln w="19050">
-            <a:solidFill>
-              <a:srgbClr val="A78425"/>
-            </a:solidFill>
+            <a:noFill/>
             <a:prstDash val="dash"/>
           </a:ln>
         </p:spPr>
@@ -5010,7 +5462,7 @@
             <a:r>
               <a:rPr sz="1200" b="0" i="0">
                 <a:solidFill>
-                  <a:srgbClr val="544212"/>
+                  <a:srgbClr val="8E8780"/>
                 </a:solidFill>
               </a:rPr>
               <a:t>사진 6</a:t>
@@ -5020,14 +5472,14 @@
       </p:sp>
       <p:sp>
         <p:nvSpPr>
-          <p:cNvPr id="10" name="사진 자리"/>
+          <p:cNvPr id="13" name="사진 자리"/>
           <p:cNvSpPr/>
           <p:nvPr/>
         </p:nvSpPr>
         <p:spPr>
           <a:xfrm>
-            <a:off x="6187287" y="4091939"/>
-            <a:ext cx="2590723" cy="2308860"/>
+            <a:off x="6187287" y="3977639"/>
+            <a:ext cx="2590723" cy="2194560"/>
           </a:xfrm>
           <a:prstGeom prst="roundRect">
             <a:avLst>
@@ -5035,12 +5487,10 @@
             </a:avLst>
           </a:prstGeom>
           <a:solidFill>
-            <a:srgbClr val="F6EACB"/>
+            <a:srgbClr val="F6EDD5"/>
           </a:solidFill>
           <a:ln w="19050">
-            <a:solidFill>
-              <a:srgbClr val="A78425"/>
-            </a:solidFill>
+            <a:noFill/>
             <a:prstDash val="dash"/>
           </a:ln>
         </p:spPr>
@@ -5058,7 +5508,7 @@
             <a:r>
               <a:rPr sz="1200" b="0" i="0">
                 <a:solidFill>
-                  <a:srgbClr val="544212"/>
+                  <a:srgbClr val="8E8780"/>
                 </a:solidFill>
               </a:rPr>
               <a:t>사진 7</a:t>
@@ -5068,14 +5518,14 @@
       </p:sp>
       <p:sp>
         <p:nvSpPr>
-          <p:cNvPr id="11" name="사진 자리"/>
+          <p:cNvPr id="14" name="사진 자리"/>
           <p:cNvSpPr/>
           <p:nvPr/>
         </p:nvSpPr>
         <p:spPr>
           <a:xfrm>
-            <a:off x="8960891" y="4091939"/>
-            <a:ext cx="2590723" cy="2308860"/>
+            <a:off x="8960891" y="3977639"/>
+            <a:ext cx="2590723" cy="2194560"/>
           </a:xfrm>
           <a:prstGeom prst="roundRect">
             <a:avLst>
@@ -5083,12 +5533,10 @@
             </a:avLst>
           </a:prstGeom>
           <a:solidFill>
-            <a:srgbClr val="F6EACB"/>
+            <a:srgbClr val="F6EDD5"/>
           </a:solidFill>
           <a:ln w="19050">
-            <a:solidFill>
-              <a:srgbClr val="A78425"/>
-            </a:solidFill>
+            <a:noFill/>
             <a:prstDash val="dash"/>
           </a:ln>
         </p:spPr>
@@ -5106,7 +5554,7 @@
             <a:r>
               <a:rPr sz="1200" b="0" i="0">
                 <a:solidFill>
-                  <a:srgbClr val="544212"/>
+                  <a:srgbClr val="8E8780"/>
                 </a:solidFill>
               </a:rPr>
               <a:t>사진 8</a:t>
@@ -5125,6 +5573,14 @@
 <file path=ppt/slides/slide6.xml><?xml version="1.0" encoding="utf-8"?>
 <p:sld xmlns:a="http://schemas.openxmlformats.org/drawingml/2006/main" xmlns:p="http://schemas.openxmlformats.org/presentationml/2006/main" xmlns:r="http://schemas.openxmlformats.org/officeDocument/2006/relationships">
   <p:cSld>
+    <p:bg>
+      <p:bgPr>
+        <a:solidFill>
+          <a:srgbClr val="F6EDD5"/>
+        </a:solidFill>
+        <a:effectLst/>
+      </p:bgPr>
+    </p:bg>
     <p:spTree>
       <p:nvGrpSpPr>
         <p:cNvPr id="1" name=""/>
@@ -5132,30 +5588,116 @@
         <p:nvPr/>
       </p:nvGrpSpPr>
       <p:grpSpPr/>
-      <p:pic>
-        <p:nvPicPr>
-          <p:cNvPr id="3" name="표지 그림" descr="birthday-44.jpg"/>
-          <p:cNvPicPr>
-            <a:picLocks noChangeAspect="1"/>
-          </p:cNvPicPr>
+      <p:sp>
+        <p:nvSpPr>
+          <p:cNvPr id="3" name="사진 자리"/>
+          <p:cNvSpPr/>
           <p:nvPr/>
-        </p:nvPicPr>
-        <p:blipFill>
-          <a:blip r:embed="rId2"/>
-          <a:stretch>
-            <a:fillRect/>
-          </a:stretch>
-        </p:blipFill>
-        <p:spPr>
-          <a:xfrm>
-            <a:off x="0" y="0"/>
-            <a:ext cx="12191695" cy="6858000"/>
+        </p:nvSpPr>
+        <p:spPr>
+          <a:xfrm>
+            <a:off x="7802684" y="0"/>
+            <a:ext cx="4389010" cy="6858000"/>
           </a:xfrm>
           <a:prstGeom prst="rect">
             <a:avLst/>
           </a:prstGeom>
-        </p:spPr>
-      </p:pic>
+          <a:solidFill>
+            <a:srgbClr val="EBDAAD"/>
+          </a:solidFill>
+          <a:ln>
+            <a:noFill/>
+          </a:ln>
+        </p:spPr>
+        <p:txBody>
+          <a:bodyPr rtlCol="0" anchor="ctr" wrap="square" lIns="54864" rIns="54864" tIns="27432" bIns="27432">
+            <a:noAutofit/>
+          </a:bodyPr>
+          <a:lstStyle/>
+          <a:p>
+            <a:pPr algn="ctr">
+              <a:lnSpc>
+                <a:spcPct val="100000"/>
+              </a:lnSpc>
+            </a:pPr>
+            <a:r>
+              <a:rPr sz="1400" b="0" i="0">
+                <a:solidFill>
+                  <a:srgbClr val="494027"/>
+                </a:solidFill>
+              </a:rPr>
+              <a:t>사진을 넣어 주세요</a:t>
+            </a:r>
+          </a:p>
+        </p:txBody>
+      </p:sp>
+      <p:sp>
+        <p:nvSpPr>
+          <p:cNvPr id="4" name="장식"/>
+          <p:cNvSpPr/>
+          <p:nvPr/>
+        </p:nvSpPr>
+        <p:spPr>
+          <a:xfrm>
+            <a:off x="8168435" y="365760"/>
+            <a:ext cx="3657508" cy="6126480"/>
+          </a:xfrm>
+          <a:prstGeom prst="rect">
+            <a:avLst/>
+          </a:prstGeom>
+          <a:noFill/>
+          <a:ln w="9525">
+            <a:solidFill>
+              <a:srgbClr val="26231F"/>
+            </a:solidFill>
+          </a:ln>
+        </p:spPr>
+        <p:txBody>
+          <a:bodyPr rtlCol="0" anchor="ctr"/>
+          <a:lstStyle/>
+          <a:p>
+            <a:pPr algn="ctr"/>
+          </a:p>
+        </p:txBody>
+      </p:sp>
+      <p:sp>
+        <p:nvSpPr>
+          <p:cNvPr id="5" name="라벨"/>
+          <p:cNvSpPr txBox="1"/>
+          <p:nvPr/>
+        </p:nvSpPr>
+        <p:spPr>
+          <a:xfrm>
+            <a:off x="822960" y="2148840"/>
+            <a:ext cx="5608179" cy="274320"/>
+          </a:xfrm>
+          <a:prstGeom prst="rect">
+            <a:avLst/>
+          </a:prstGeom>
+          <a:noFill/>
+        </p:spPr>
+        <p:txBody>
+          <a:bodyPr wrap="square" lIns="54864" rIns="54864" tIns="27432" bIns="27432" anchor="t">
+            <a:noAutofit/>
+          </a:bodyPr>
+          <a:lstStyle/>
+          <a:p>
+            <a:pPr algn="l">
+              <a:lnSpc>
+                <a:spcPct val="115000"/>
+              </a:lnSpc>
+            </a:pPr>
+            <a:r>
+              <a:rPr sz="1000" b="1" i="0" spc="250">
+                <a:solidFill>
+                  <a:srgbClr val="26231F"/>
+                </a:solidFill>
+              </a:rPr>
+              <a:t>FIRST BIRTHDAY</a:t>
+            </a:r>
+          </a:p>
+        </p:txBody>
+      </p:sp>
       <p:sp>
         <p:nvSpPr>
           <p:cNvPr id="2" name="Title 1"/>
@@ -5168,8 +5710,8 @@
         </p:nvSpPr>
         <p:spPr>
           <a:xfrm>
-            <a:off x="853418" y="2057400"/>
-            <a:ext cx="6095847" cy="1554480"/>
+            <a:off x="822960" y="2606040"/>
+            <a:ext cx="5608179" cy="1188720"/>
           </a:xfrm>
         </p:spPr>
         <p:txBody>
@@ -5186,7 +5728,7 @@
             <a:r>
               <a:rPr sz="3400" b="1" i="0">
                 <a:solidFill>
-                  <a:srgbClr val="544212"/>
+                  <a:srgbClr val="26231F"/>
                 </a:solidFill>
               </a:rPr>
               <a:t>와 주셔서 고맙습니다</a:t>
@@ -5196,14 +5738,14 @@
       </p:sp>
       <p:sp>
         <p:nvSpPr>
-          <p:cNvPr id="4" name="한 줄 문구"/>
+          <p:cNvPr id="6" name="한 줄 문구"/>
           <p:cNvSpPr txBox="1"/>
           <p:nvPr/>
         </p:nvSpPr>
         <p:spPr>
           <a:xfrm>
-            <a:off x="853418" y="3749039"/>
-            <a:ext cx="6095847" cy="822960"/>
+            <a:off x="822960" y="3886200"/>
+            <a:ext cx="5608179" cy="822960"/>
           </a:xfrm>
           <a:prstGeom prst="rect">
             <a:avLst/>
@@ -5222,9 +5764,9 @@
               </a:lnSpc>
             </a:pPr>
             <a:r>
-              <a:rPr sz="1700" b="0" i="1">
+              <a:rPr sz="1700" b="0" i="0">
                 <a:solidFill>
-                  <a:srgbClr val="544212"/>
+                  <a:srgbClr val="26231F"/>
                 </a:solidFill>
               </a:rPr>
               <a:t>아이가 한 살이 되었습니다</a:t>
@@ -5234,14 +5776,14 @@
       </p:sp>
       <p:sp>
         <p:nvSpPr>
-          <p:cNvPr id="5" name="안내 문구"/>
+          <p:cNvPr id="7" name="안내 문구"/>
           <p:cNvSpPr txBox="1"/>
           <p:nvPr/>
         </p:nvSpPr>
         <p:spPr>
           <a:xfrm>
-            <a:off x="853418" y="4617720"/>
-            <a:ext cx="6095847" cy="914400"/>
+            <a:off x="822960" y="4754880"/>
+            <a:ext cx="5608179" cy="914400"/>
           </a:xfrm>
           <a:prstGeom prst="rect">
             <a:avLst/>
@@ -5262,7 +5804,7 @@
             <a:r>
               <a:rPr sz="1400" b="0" i="0">
                 <a:solidFill>
-                  <a:srgbClr val="666666"/>
+                  <a:srgbClr val="26231F"/>
                 </a:solidFill>
               </a:rPr>
               <a:t>아기 이름 · 부모 이름</a:t>
@@ -5289,34 +5831,34 @@
         <a:sysClr val="window" lastClr="FFFFFF"/>
       </a:lt1>
       <a:dk2>
-        <a:srgbClr val="544212"/>
+        <a:srgbClr val="494027"/>
       </a:dk2>
       <a:lt2>
-        <a:srgbClr val="FBF8EE"/>
+        <a:srgbClr val="FBF7EC"/>
       </a:lt2>
       <a:accent1>
-        <a:srgbClr val="A78425"/>
+        <a:srgbClr val="E1CE98"/>
       </a:accent1>
       <a:accent2>
-        <a:srgbClr val="3B7D91"/>
+        <a:srgbClr val="E0EAB8"/>
       </a:accent2>
       <a:accent3>
-        <a:srgbClr val="544212"/>
+        <a:srgbClr val="494027"/>
       </a:accent3>
       <a:accent4>
-        <a:srgbClr val="F6EACB"/>
+        <a:srgbClr val="F6EDD5"/>
       </a:accent4>
       <a:accent5>
-        <a:srgbClr val="71805B"/>
+        <a:srgbClr val="E0DCA8"/>
       </a:accent5>
       <a:accent6>
-        <a:srgbClr val="988E71"/>
+        <a:srgbClr val="928C7D"/>
       </a:accent6>
       <a:hlink>
-        <a:srgbClr val="A78425"/>
+        <a:srgbClr val="E1CE98"/>
       </a:hlink>
       <a:folHlink>
-        <a:srgbClr val="544212"/>
+        <a:srgbClr val="494027"/>
       </a:folHlink>
     </a:clrScheme>
     <a:fontScheme name="Office">
